--- a/生成的课件/10_管理经济学_第10章_市场失灵与政府的经济作用.pptx
+++ b/生成的课件/10_管理经济学_第10章_市场失灵与政府的经济作用.pptx
@@ -4026,7 +4026,7 @@
                 <a:latin typeface="Times New Roman"/>
                 <a:ea typeface="宋体"/>
               </a:rPr>
-              <a:t>  1. 平台经济与双边市场（Two-Sided Markets）特征</a:t>
+              <a:t>1. 平台经济与双边市场（Two-Sided Markets）特征</a:t>
             </a:r>
           </a:p>
         </p:txBody>
@@ -4069,7 +4069,7 @@
                 <a:latin typeface="Times New Roman"/>
                 <a:ea typeface="宋体"/>
               </a:rPr>
-              <a:t>（1）交叉网络外部性（Cross-side Network Externality）： </a:t>
+              <a:t>（1）交叉网络外部性（Cross-side Network Externality）：</a:t>
             </a:r>
             <a:r>
               <a:rPr sz="1250" b="0">
@@ -4099,7 +4099,7 @@
                 <a:latin typeface="Times New Roman"/>
                 <a:ea typeface="宋体"/>
               </a:rPr>
-              <a:t>（2）新型垄断行为： </a:t>
+              <a:t>（2）新型垄断行为：</a:t>
             </a:r>
             <a:r>
               <a:rPr sz="1250" b="0">
@@ -4209,7 +4209,7 @@
                 <a:latin typeface="Times New Roman"/>
                 <a:ea typeface="宋体"/>
               </a:rPr>
-              <a:t>  2. 案例10-2：中国平台经济反垄断里程碑重磅执法</a:t>
+              <a:t>2. 案例10-2：中国平台经济反垄断里程碑重磅执法</a:t>
             </a:r>
           </a:p>
         </p:txBody>
@@ -4252,7 +4252,7 @@
                 <a:latin typeface="Times New Roman"/>
                 <a:ea typeface="宋体"/>
               </a:rPr>
-              <a:t>（1）反垄断处罚： </a:t>
+              <a:t>（1）反垄断处罚：</a:t>
             </a:r>
             <a:r>
               <a:rPr sz="1250" b="0">
@@ -4282,7 +4282,7 @@
                 <a:latin typeface="Times New Roman"/>
                 <a:ea typeface="宋体"/>
               </a:rPr>
-              <a:t>（2）监管启示： </a:t>
+              <a:t>（2）监管启示：</a:t>
             </a:r>
             <a:r>
               <a:rPr sz="1250" b="0">
@@ -4349,7 +4349,7 @@
                 <a:latin typeface="Times New Roman"/>
                 <a:ea typeface="宋体"/>
               </a:rPr>
-              <a:t>  ★ 核心要点：数字经济反垄断聚焦跨界生态与算法霸权，成为维护开放创新与数字市场公平竞争的核心前沿。</a:t>
+              <a:t>★ 核心要点：数字经济反垄断聚焦跨界生态与算法霸权，成为维护开放创新与数字市场公平竞争的核心前沿。</a:t>
             </a:r>
           </a:p>
         </p:txBody>
@@ -5063,7 +5063,7 @@
                 <a:latin typeface="Times New Roman"/>
                 <a:ea typeface="宋体"/>
               </a:rPr>
-              <a:t>  1. 外部经济效应的供求失灵机理</a:t>
+              <a:t>1. 外部经济效应的供求失灵机理</a:t>
             </a:r>
           </a:p>
         </p:txBody>
@@ -5106,7 +5106,7 @@
                 <a:latin typeface="Times New Roman"/>
                 <a:ea typeface="宋体"/>
               </a:rPr>
-              <a:t>（1）负外部性（如工业污染、噪音）： </a:t>
+              <a:t>（1）负外部性（如工业污染、噪音）：</a:t>
             </a:r>
             <a:r>
               <a:rPr sz="1250" b="0">
@@ -5116,7 +5116,7 @@
                 <a:latin typeface="Times New Roman"/>
                 <a:ea typeface="宋体"/>
               </a:rPr>
-              <a:t>社会边际成本 SMC = 私人成本 PMC + 外部损害 MEC &gt; PMC \implies 自由市场产量过剩（Q_{market} &gt; Q_{social}^*）、价格过低。</a:t>
+              <a:t>社会边际成本 SMC = 私人成本 PMC + 外部损害 MEC &gt; PMC ⇒ 自由市场产量过剩（Q_market &gt; Q*(社会最优)）、价格过低。</a:t>
             </a:r>
           </a:p>
           <a:p>
@@ -5136,7 +5136,7 @@
                 <a:latin typeface="Times New Roman"/>
                 <a:ea typeface="宋体"/>
               </a:rPr>
-              <a:t>（2）正外部性（如疫苗研发、绿化）： </a:t>
+              <a:t>（2）正外部性（如疫苗研发、绿化）：</a:t>
             </a:r>
             <a:r>
               <a:rPr sz="1250" b="0">
@@ -5146,7 +5146,7 @@
                 <a:latin typeface="Times New Roman"/>
                 <a:ea typeface="宋体"/>
               </a:rPr>
-              <a:t>社会边际收益 SMB = 私人收益 PMB + 外部收益 MEB &gt; PMB \implies 自由市场供给严重不足（Q_{market} &lt; Q_{social}^*）。</a:t>
+              <a:t>社会边际收益 SMB = 私人收益 PMB + 外部收益 MEB &gt; PMB ⇒ 自由市场供给严重不足（Q_market &lt; Q*(社会最优)）。</a:t>
             </a:r>
           </a:p>
         </p:txBody>
@@ -5246,7 +5246,7 @@
                 <a:latin typeface="Times New Roman"/>
                 <a:ea typeface="宋体"/>
               </a:rPr>
-              <a:t>  2. 庇古税（Pigouvian Tax）与庇古补贴数理模型</a:t>
+              <a:t>2. 庇古税（Pigouvian Tax）与庇古补贴数理模型</a:t>
             </a:r>
           </a:p>
         </p:txBody>
@@ -5289,7 +5289,7 @@
                 <a:latin typeface="Times New Roman"/>
                 <a:ea typeface="宋体"/>
               </a:rPr>
-              <a:t>（1）最优庇古税征收法则： </a:t>
+              <a:t>（1）最优庇古税征收法则：</a:t>
             </a:r>
             <a:r>
               <a:rPr sz="1250" b="0">
@@ -5299,7 +5299,7 @@
                 <a:latin typeface="Times New Roman"/>
                 <a:ea typeface="宋体"/>
               </a:rPr>
-              <a:t>对排污企业征收等于最优产出点处边际外部损害的从量税：t^* = MEC(Q^*) = SMC - PMC，使外部成本完全内部化！</a:t>
+              <a:t>对排污企业征收等于最优产出点处边际外部损害的从量税：t* = MEC(Q*) = SMC - PMC，使外部成本完全内部化！</a:t>
             </a:r>
           </a:p>
           <a:p>
@@ -5319,7 +5319,7 @@
                 <a:latin typeface="Times New Roman"/>
                 <a:ea typeface="宋体"/>
               </a:rPr>
-              <a:t>（2）最优庇古补贴（Pigouvian Subsidy）： </a:t>
+              <a:t>（2）最优庇古补贴（Pigouvian Subsidy）：</a:t>
             </a:r>
             <a:r>
               <a:rPr sz="1250" b="0">
@@ -5329,7 +5329,7 @@
                 <a:latin typeface="Times New Roman"/>
                 <a:ea typeface="宋体"/>
               </a:rPr>
-              <a:t>对提供正外部性的研发与植树企业提供等于边际外部收益的财政补贴：s^* = MEB(Q^*)，将供给量拉升至社会最优。</a:t>
+              <a:t>对提供正外部性的研发与植树企业提供等于边际外部收益的财政补贴：s* = MEB(Q*)，将供给量拉升至社会最优。</a:t>
             </a:r>
           </a:p>
         </p:txBody>
@@ -5386,7 +5386,7 @@
                 <a:latin typeface="Times New Roman"/>
                 <a:ea typeface="宋体"/>
               </a:rPr>
-              <a:t>  ★ 核心要点：庇古税通过价格杠杆将外部性内部化，恢复了市场价格信号反映全社会真实成本的导向功能。</a:t>
+              <a:t>★ 核心要点：庇古税通过价格杠杆将外部性内部化，恢复了市场价格信号反映全社会真实成本的导向功能。</a:t>
             </a:r>
           </a:p>
         </p:txBody>
@@ -5793,7 +5793,7 @@
                 <a:latin typeface="Times New Roman"/>
                 <a:ea typeface="宋体"/>
               </a:rPr>
-              <a:t>  1. 科斯定理的核心理论命题</a:t>
+              <a:t>1. 科斯定理的核心理论命题</a:t>
             </a:r>
           </a:p>
         </p:txBody>
@@ -5836,7 +5836,7 @@
                 <a:latin typeface="Times New Roman"/>
                 <a:ea typeface="宋体"/>
               </a:rPr>
-              <a:t>（1）科斯第一定理： </a:t>
+              <a:t>（1）科斯第一定理：</a:t>
             </a:r>
             <a:r>
               <a:rPr sz="1250" b="0">
@@ -5866,7 +5866,7 @@
                 <a:latin typeface="Times New Roman"/>
                 <a:ea typeface="宋体"/>
               </a:rPr>
-              <a:t>（2）交易费用的现实制约： </a:t>
+              <a:t>（2）交易费用的现实制约：</a:t>
             </a:r>
             <a:r>
               <a:rPr sz="1250" b="0">
@@ -5976,7 +5976,7 @@
                 <a:latin typeface="Times New Roman"/>
                 <a:ea typeface="宋体"/>
               </a:rPr>
-              <a:t>  2. 案例10-3：排污权有偿交易制度（ETS）实证</a:t>
+              <a:t>2. 案例10-3：排污权有偿交易制度（ETS）实证</a:t>
             </a:r>
           </a:p>
         </p:txBody>
@@ -6019,7 +6019,7 @@
                 <a:latin typeface="Times New Roman"/>
                 <a:ea typeface="宋体"/>
               </a:rPr>
-              <a:t>（1）运作机制： </a:t>
+              <a:t>（1）运作机制：</a:t>
             </a:r>
             <a:r>
               <a:rPr sz="1250" b="0">
@@ -6049,7 +6049,7 @@
                 <a:latin typeface="Times New Roman"/>
                 <a:ea typeface="宋体"/>
               </a:rPr>
-              <a:t>（2）全社会成本最低： </a:t>
+              <a:t>（2）全社会成本最低：</a:t>
             </a:r>
             <a:r>
               <a:rPr sz="1250" b="0">
@@ -6116,7 +6116,7 @@
                 <a:latin typeface="Times New Roman"/>
                 <a:ea typeface="宋体"/>
               </a:rPr>
-              <a:t>  ★ 核心要点：从行政命令庇古税走向市场化科斯排污权交易，体现了环境经济学治理工具的重大跃迁。</a:t>
+              <a:t>★ 核心要点：从行政命令庇古税走向市场化科斯排污权交易，体现了环境经济学治理工具的重大跃迁。</a:t>
             </a:r>
           </a:p>
         </p:txBody>
@@ -6830,7 +6830,7 @@
                 <a:latin typeface="Times New Roman"/>
                 <a:ea typeface="宋体"/>
               </a:rPr>
-              <a:t>  1. 纯公共物品（Pure Public Goods）两大核心属性</a:t>
+              <a:t>1. 纯公共物品（Pure Public Goods）两大核心属性</a:t>
             </a:r>
           </a:p>
         </p:txBody>
@@ -6873,7 +6873,7 @@
                 <a:latin typeface="Times New Roman"/>
                 <a:ea typeface="宋体"/>
               </a:rPr>
-              <a:t>（1）非排他性（Non-excludability）： </a:t>
+              <a:t>（1）非排他性（Non-excludability）：</a:t>
             </a:r>
             <a:r>
               <a:rPr sz="1250" b="0">
@@ -6903,7 +6903,7 @@
                 <a:latin typeface="Times New Roman"/>
                 <a:ea typeface="宋体"/>
               </a:rPr>
-              <a:t>（2）非竞争性（Non-rivalry）： </a:t>
+              <a:t>（2）非竞争性（Non-rivalry）：</a:t>
             </a:r>
             <a:r>
               <a:rPr sz="1250" b="0">
@@ -7013,7 +7013,7 @@
                 <a:latin typeface="Times New Roman"/>
                 <a:ea typeface="宋体"/>
               </a:rPr>
-              <a:t>  2. 搭便车困境（Free-rider Problem）与市场彻底失灵</a:t>
+              <a:t>2. 搭便车困境（Free-rider Problem）与市场彻底失灵</a:t>
             </a:r>
           </a:p>
         </p:txBody>
@@ -7056,7 +7056,7 @@
                 <a:latin typeface="Times New Roman"/>
                 <a:ea typeface="宋体"/>
               </a:rPr>
-              <a:t>（1）理性人隐瞒偏好： </a:t>
+              <a:t>（1）理性人隐瞒偏好：</a:t>
             </a:r>
             <a:r>
               <a:rPr sz="1250" b="0">
@@ -7086,7 +7086,7 @@
                 <a:latin typeface="Times New Roman"/>
                 <a:ea typeface="宋体"/>
               </a:rPr>
-              <a:t>（2）私人市场供给为零： </a:t>
+              <a:t>（2）私人市场供给为零：</a:t>
             </a:r>
             <a:r>
               <a:rPr sz="1250" b="0">
@@ -7116,7 +7116,7 @@
                 <a:latin typeface="Times New Roman"/>
                 <a:ea typeface="宋体"/>
               </a:rPr>
-              <a:t>（3）政府强制税收供给： </a:t>
+              <a:t>（3）政府强制税收供给：</a:t>
             </a:r>
             <a:r>
               <a:rPr sz="1250" b="0">
@@ -7183,7 +7183,7 @@
                 <a:latin typeface="Times New Roman"/>
                 <a:ea typeface="宋体"/>
               </a:rPr>
-              <a:t>  ★ 核心要点：公共物品的非排他性摧毁了市场价格收费的物理基础，确立了政府公共财政支出的核心正当性。</a:t>
+              <a:t>★ 核心要点：公共物品的非排他性摧毁了市场价格收费的物理基础，确立了政府公共财政支出的核心正当性。</a:t>
             </a:r>
           </a:p>
         </p:txBody>
@@ -7590,7 +7590,7 @@
                 <a:latin typeface="Times New Roman"/>
                 <a:ea typeface="宋体"/>
               </a:rPr>
-              <a:t>  1. 林达尔均衡（Lindahl Equilibrium）需求垂直加总</a:t>
+              <a:t>1. 林达尔均衡（Lindahl Equilibrium）需求垂直加总</a:t>
             </a:r>
           </a:p>
         </p:txBody>
@@ -7633,7 +7633,7 @@
                 <a:latin typeface="Times New Roman"/>
                 <a:ea typeface="宋体"/>
               </a:rPr>
-              <a:t>（1）私人物品需求加总： </a:t>
+              <a:t>（1）私人物品需求加总：</a:t>
             </a:r>
             <a:r>
               <a:rPr sz="1250" b="0">
@@ -7643,7 +7643,7 @@
                 <a:latin typeface="Times New Roman"/>
                 <a:ea typeface="宋体"/>
               </a:rPr>
-              <a:t>在既定价格下，将所有消费者的需求量进行水平横向加总（\sum Q_i）。</a:t>
+              <a:t>在既定价格下，将所有消费者的需求量进行水平横向加总（∑ Qᵢ）。</a:t>
             </a:r>
           </a:p>
           <a:p>
@@ -7663,7 +7663,7 @@
                 <a:latin typeface="Times New Roman"/>
                 <a:ea typeface="宋体"/>
               </a:rPr>
-              <a:t>（2）公共物品需求加总： </a:t>
+              <a:t>（2）公共物品需求加总：</a:t>
             </a:r>
             <a:r>
               <a:rPr sz="1250" b="0">
@@ -7673,7 +7673,7 @@
                 <a:latin typeface="Times New Roman"/>
                 <a:ea typeface="宋体"/>
               </a:rPr>
-              <a:t>在既定公共品供给数量下，将所有消费者愿意支付的个人意愿价格进行垂直纵向加总（\sum P_i = MC）！</a:t>
+              <a:t>在既定公共品供给数量下，将所有消费者愿意支付的个人意愿价格进行垂直纵向加总（∑ Pᵢ = MC）！</a:t>
             </a:r>
           </a:p>
           <a:p>
@@ -7693,7 +7693,7 @@
                 <a:latin typeface="Times New Roman"/>
                 <a:ea typeface="宋体"/>
               </a:rPr>
-              <a:t>（3）林达尔税率： </a:t>
+              <a:t>（3）林达尔税率：</a:t>
             </a:r>
             <a:r>
               <a:rPr sz="1250" b="0">
@@ -7803,7 +7803,7 @@
                 <a:latin typeface="Times New Roman"/>
                 <a:ea typeface="宋体"/>
               </a:rPr>
-              <a:t>  2. 知识产权与专利制度的双刃剑权衡</a:t>
+              <a:t>2. 知识产权与专利制度的双刃剑权衡</a:t>
             </a:r>
           </a:p>
         </p:txBody>
@@ -7846,7 +7846,7 @@
                 <a:latin typeface="Times New Roman"/>
                 <a:ea typeface="宋体"/>
               </a:rPr>
-              <a:t>（1）知识的公共品属性： </a:t>
+              <a:t>（1）知识的公共品属性：</a:t>
             </a:r>
             <a:r>
               <a:rPr sz="1250" b="0">
@@ -7876,7 +7876,7 @@
                 <a:latin typeface="Times New Roman"/>
                 <a:ea typeface="宋体"/>
               </a:rPr>
-              <a:t>（2）专利制度的制度设计： </a:t>
+              <a:t>（2）专利制度的制度设计：</a:t>
             </a:r>
             <a:r>
               <a:rPr sz="1250" b="0">
@@ -7943,7 +7943,7 @@
                 <a:latin typeface="Times New Roman"/>
                 <a:ea typeface="宋体"/>
               </a:rPr>
-              <a:t>  ★ 核心要点：专利制度以制度性的人为垄断克服了知识公共品的搭便车悲剧，展现了制度设计的精妙平衡。</a:t>
+              <a:t>★ 核心要点：专利制度以制度性的人为垄断克服了知识公共品的搭便车悲剧，展现了制度设计的精妙平衡。</a:t>
             </a:r>
           </a:p>
         </p:txBody>
@@ -8350,7 +8350,7 @@
                 <a:latin typeface="Times New Roman"/>
                 <a:ea typeface="宋体"/>
               </a:rPr>
-              <a:t>  1. 公共池塘资源（Common-Pool Resources）特征与困局</a:t>
+              <a:t>1. 公共池塘资源（Common-Pool Resources）特征与困局</a:t>
             </a:r>
           </a:p>
         </p:txBody>
@@ -8393,7 +8393,7 @@
                 <a:latin typeface="Times New Roman"/>
                 <a:ea typeface="宋体"/>
               </a:rPr>
-              <a:t>（1）两大属性： </a:t>
+              <a:t>（1）两大属性：</a:t>
             </a:r>
             <a:r>
               <a:rPr sz="1250" b="0">
@@ -8423,7 +8423,7 @@
                 <a:latin typeface="Times New Roman"/>
                 <a:ea typeface="宋体"/>
               </a:rPr>
-              <a:t>（2）公地悲剧（哈丁假说）： </a:t>
+              <a:t>（2）公地悲剧（哈丁假说）：</a:t>
             </a:r>
             <a:r>
               <a:rPr sz="1250" b="0">
@@ -8533,7 +8533,7 @@
                 <a:latin typeface="Times New Roman"/>
                 <a:ea typeface="宋体"/>
               </a:rPr>
-              <a:t>  2. 埃莉诺·奥斯特罗姆诺奖自主治理模式</a:t>
+              <a:t>2. 埃莉诺·奥斯特罗姆诺奖自主治理模式</a:t>
             </a:r>
           </a:p>
         </p:txBody>
@@ -8576,7 +8576,7 @@
                 <a:latin typeface="Times New Roman"/>
                 <a:ea typeface="宋体"/>
               </a:rPr>
-              <a:t>（1）超越政府命令与私有化两分法： </a:t>
+              <a:t>（1）超越政府命令与私有化两分法：</a:t>
             </a:r>
             <a:r>
               <a:rPr sz="1250" b="0">
@@ -8606,7 +8606,7 @@
                 <a:latin typeface="Times New Roman"/>
                 <a:ea typeface="宋体"/>
               </a:rPr>
-              <a:t>（2）启示： </a:t>
+              <a:t>（2）启示：</a:t>
             </a:r>
             <a:r>
               <a:rPr sz="1250" b="0">
@@ -8673,7 +8673,7 @@
                 <a:latin typeface="Times New Roman"/>
                 <a:ea typeface="宋体"/>
               </a:rPr>
-              <a:t>  ★ 核心要点：公地悲剧揭示了产权界定与社群治理规则对保护自然生态与公共资源的极端重要性。</a:t>
+              <a:t>★ 核心要点：公地悲剧揭示了产权界定与社群治理规则对保护自然生态与公共资源的极端重要性。</a:t>
             </a:r>
           </a:p>
         </p:txBody>
@@ -9387,7 +9387,7 @@
                 <a:latin typeface="Times New Roman"/>
                 <a:ea typeface="宋体"/>
               </a:rPr>
-              <a:t>  1. 阿克洛夫'柠檬市场'（Lemons Market）模型</a:t>
+              <a:t>1. 阿克洛夫'柠檬市场'（Lemons Market）模型</a:t>
             </a:r>
           </a:p>
         </p:txBody>
@@ -9430,7 +9430,7 @@
                 <a:latin typeface="Times New Roman"/>
                 <a:ea typeface="宋体"/>
               </a:rPr>
-              <a:t>（1）交易前信息不对称（事前劣势）： </a:t>
+              <a:t>（1）交易前信息不对称（事前劣势）：</a:t>
             </a:r>
             <a:r>
               <a:rPr sz="1250" b="0">
@@ -9460,7 +9460,7 @@
                 <a:latin typeface="Times New Roman"/>
                 <a:ea typeface="宋体"/>
               </a:rPr>
-              <a:t>（2）平均意愿出价： </a:t>
+              <a:t>（2）平均意愿出价：</a:t>
             </a:r>
             <a:r>
               <a:rPr sz="1250" b="0">
@@ -9490,7 +9490,7 @@
                 <a:latin typeface="Times New Roman"/>
                 <a:ea typeface="宋体"/>
               </a:rPr>
-              <a:t>（3）劣币驱逐良币恶性循环： </a:t>
+              <a:t>（3）劣币驱逐良币恶性循环：</a:t>
             </a:r>
             <a:r>
               <a:rPr sz="1250" b="0">
@@ -9600,7 +9600,7 @@
                 <a:latin typeface="Times New Roman"/>
                 <a:ea typeface="宋体"/>
               </a:rPr>
-              <a:t>  2. 市场化信号传递机制（Market Signaling）</a:t>
+              <a:t>2. 市场化信号传递机制（Market Signaling）</a:t>
             </a:r>
           </a:p>
         </p:txBody>
@@ -9643,7 +9643,7 @@
                 <a:latin typeface="Times New Roman"/>
                 <a:ea typeface="宋体"/>
               </a:rPr>
-              <a:t>（1）企业主动发送信号： </a:t>
+              <a:t>（1）企业主动发送信号：</a:t>
             </a:r>
             <a:r>
               <a:rPr sz="1250" b="0">
@@ -9673,7 +9673,7 @@
                 <a:latin typeface="Times New Roman"/>
                 <a:ea typeface="宋体"/>
               </a:rPr>
-              <a:t>（2）斯宾塞文凭信号模型： </a:t>
+              <a:t>（2）斯宾塞文凭信号模型：</a:t>
             </a:r>
             <a:r>
               <a:rPr sz="1250" b="0">
@@ -9740,7 +9740,7 @@
                 <a:latin typeface="Times New Roman"/>
                 <a:ea typeface="宋体"/>
               </a:rPr>
-              <a:t>  ★ 核心要点：逆向选择揭示了信息不对称导致市场自发萎缩的机理，有效信号传递是打破柠檬僵局的关键。</a:t>
+              <a:t>★ 核心要点：逆向选择揭示了信息不对称导致市场自发萎缩的机理，有效信号传递是打破柠檬僵局的关键。</a:t>
             </a:r>
           </a:p>
         </p:txBody>
@@ -11742,7 +11742,7 @@
                 <a:latin typeface="Times New Roman"/>
                 <a:ea typeface="宋体"/>
               </a:rPr>
-              <a:t>  1. 道德风险（Moral Hazard / 交易后机会主义行为）</a:t>
+              <a:t>1. 道德风险（Moral Hazard / 交易后机会主义行为）</a:t>
             </a:r>
           </a:p>
         </p:txBody>
@@ -11785,7 +11785,7 @@
                 <a:latin typeface="Times New Roman"/>
                 <a:ea typeface="宋体"/>
               </a:rPr>
-              <a:t>（1）概念界定： </a:t>
+              <a:t>（1）概念界定：</a:t>
             </a:r>
             <a:r>
               <a:rPr sz="1250" b="0">
@@ -11815,7 +11815,7 @@
                 <a:latin typeface="Times New Roman"/>
                 <a:ea typeface="宋体"/>
               </a:rPr>
-              <a:t>（2）商业保险典型范例： </a:t>
+              <a:t>（2）商业保险典型范例：</a:t>
             </a:r>
             <a:r>
               <a:rPr sz="1250" b="0">
@@ -11845,7 +11845,7 @@
                 <a:latin typeface="Times New Roman"/>
                 <a:ea typeface="宋体"/>
               </a:rPr>
-              <a:t>（3）金融信贷道德风险： </a:t>
+              <a:t>（3）金融信贷道德风险：</a:t>
             </a:r>
             <a:r>
               <a:rPr sz="1250" b="0">
@@ -11955,7 +11955,7 @@
                 <a:latin typeface="Times New Roman"/>
                 <a:ea typeface="宋体"/>
               </a:rPr>
-              <a:t>  2. 激励相容契约设计与政府强制信息披露规制</a:t>
+              <a:t>2. 激励相容契约设计与政府强制信息披露规制</a:t>
             </a:r>
           </a:p>
         </p:txBody>
@@ -11998,7 +11998,7 @@
                 <a:latin typeface="Times New Roman"/>
                 <a:ea typeface="宋体"/>
               </a:rPr>
-              <a:t>（1）共保与免赔额条款： </a:t>
+              <a:t>（1）共保与免赔额条款：</a:t>
             </a:r>
             <a:r>
               <a:rPr sz="1250" b="0">
@@ -12028,7 +12028,7 @@
                 <a:latin typeface="Times New Roman"/>
                 <a:ea typeface="宋体"/>
               </a:rPr>
-              <a:t>（2）政府强制信息披露规制： </a:t>
+              <a:t>（2）政府强制信息披露规制：</a:t>
             </a:r>
             <a:r>
               <a:rPr sz="1250" b="0">
@@ -12095,7 +12095,7 @@
                 <a:latin typeface="Times New Roman"/>
                 <a:ea typeface="宋体"/>
               </a:rPr>
-              <a:t>  ★ 核心要点：激励相容契约与政府法制监管双管齐下，是克服道德风险、筑牢现代商业诚信底座的根本保障。</a:t>
+              <a:t>★ 核心要点：激励相容契约与政府法制监管双管齐下，是克服道德风险、筑牢现代商业诚信底座的根本保障。</a:t>
             </a:r>
           </a:p>
         </p:txBody>
@@ -12502,7 +12502,7 @@
                 <a:latin typeface="Times New Roman"/>
                 <a:ea typeface="宋体"/>
               </a:rPr>
-              <a:t>  垄断及其微观规制</a:t>
+              <a:t>垄断及其微观规制</a:t>
             </a:r>
           </a:p>
         </p:txBody>
@@ -12706,7 +12706,7 @@
                 <a:latin typeface="Times New Roman"/>
                 <a:ea typeface="宋体"/>
               </a:rPr>
-              <a:t>  外部性与产权治理</a:t>
+              <a:t>外部性与产权治理</a:t>
             </a:r>
           </a:p>
         </p:txBody>
@@ -12910,7 +12910,7 @@
                 <a:latin typeface="Times New Roman"/>
                 <a:ea typeface="宋体"/>
               </a:rPr>
-              <a:t>  公共物品与搭便车</a:t>
+              <a:t>公共物品与搭便车</a:t>
             </a:r>
           </a:p>
         </p:txBody>
@@ -13114,7 +13114,7 @@
                 <a:latin typeface="Times New Roman"/>
                 <a:ea typeface="宋体"/>
               </a:rPr>
-              <a:t>  信息不对称与信号机制</a:t>
+              <a:t>信息不对称与信号机制</a:t>
             </a:r>
           </a:p>
         </p:txBody>
@@ -13275,7 +13275,7 @@
                 <a:latin typeface="Times New Roman"/>
                 <a:ea typeface="宋体"/>
               </a:rPr>
-              <a:t>  ★ 战略结语：政府与市场并非对立，政府的合法经济功能在于充当公平竞争的裁判员、公共物品的提供者与市场失灵的纠偏者。</a:t>
+              <a:t>★ 战略结语：政府与市场并非对立，政府的合法经济功能在于充当公平竞争的裁判员、公共物品的提供者与市场失灵的纠偏者。</a:t>
             </a:r>
           </a:p>
         </p:txBody>
@@ -13682,7 +13682,7 @@
                 <a:latin typeface="Times New Roman"/>
                 <a:ea typeface="宋体"/>
               </a:rPr>
-              <a:t>  课后复习思考题与 MBA 讨论案例（严格对应课本习题）</a:t>
+              <a:t>课后复习思考题与 MBA 讨论案例（严格对应课本习题）</a:t>
             </a:r>
           </a:p>
         </p:txBody>
@@ -13725,7 +13725,7 @@
                 <a:latin typeface="Times New Roman"/>
                 <a:ea typeface="宋体"/>
               </a:rPr>
-              <a:t>1. </a:t>
+              <a:t>1.</a:t>
             </a:r>
             <a:r>
               <a:rPr sz="1250" b="0">
@@ -13755,7 +13755,7 @@
                 <a:latin typeface="Times New Roman"/>
                 <a:ea typeface="宋体"/>
               </a:rPr>
-              <a:t>2. </a:t>
+              <a:t>2.</a:t>
             </a:r>
             <a:r>
               <a:rPr sz="1250" b="0">
@@ -13785,7 +13785,7 @@
                 <a:latin typeface="Times New Roman"/>
                 <a:ea typeface="宋体"/>
               </a:rPr>
-              <a:t>3. </a:t>
+              <a:t>3.</a:t>
             </a:r>
             <a:r>
               <a:rPr sz="1250" b="0">
@@ -13815,7 +13815,7 @@
                 <a:latin typeface="Times New Roman"/>
                 <a:ea typeface="宋体"/>
               </a:rPr>
-              <a:t>4. </a:t>
+              <a:t>4.</a:t>
             </a:r>
             <a:r>
               <a:rPr sz="1250" b="0">
@@ -13845,7 +13845,7 @@
                 <a:latin typeface="Times New Roman"/>
                 <a:ea typeface="宋体"/>
               </a:rPr>
-              <a:t>5. </a:t>
+              <a:t>5.</a:t>
             </a:r>
             <a:r>
               <a:rPr sz="1250" b="0">
@@ -13875,7 +13875,7 @@
                 <a:latin typeface="Times New Roman"/>
                 <a:ea typeface="宋体"/>
               </a:rPr>
-              <a:t>6. </a:t>
+              <a:t>6.</a:t>
             </a:r>
             <a:r>
               <a:rPr sz="1250" b="0">
@@ -14599,7 +14599,7 @@
                 <a:latin typeface="Times New Roman"/>
                 <a:ea typeface="宋体"/>
               </a:rPr>
-              <a:t>  1. 帕累托最优（Pareto Optimality）三大基准准则</a:t>
+              <a:t>1. 帕累托最优（Pareto Optimality）三大基准准则</a:t>
             </a:r>
           </a:p>
         </p:txBody>
@@ -14642,7 +14642,7 @@
                 <a:latin typeface="Times New Roman"/>
                 <a:ea typeface="宋体"/>
               </a:rPr>
-              <a:t>（1）概念界定： </a:t>
+              <a:t>（1）概念界定：</a:t>
             </a:r>
             <a:r>
               <a:rPr sz="1250" b="0">
@@ -14672,7 +14672,7 @@
                 <a:latin typeface="Times New Roman"/>
                 <a:ea typeface="宋体"/>
               </a:rPr>
-              <a:t>（2）生产最优准则： </a:t>
+              <a:t>（2）生产最优准则：</a:t>
             </a:r>
             <a:r>
               <a:rPr sz="1250" b="0">
@@ -14682,7 +14682,7 @@
                 <a:latin typeface="Times New Roman"/>
                 <a:ea typeface="宋体"/>
               </a:rPr>
-              <a:t>任意两种要素生产任意两种产品的边际技术替代率相等：MRTS_{LK}^X = MRTS_{LK}^Y。</a:t>
+              <a:t>任意两种要素生产任意两种产品的边际技术替代率相等：MRTS_LK^X = MRTS_LK^Y。</a:t>
             </a:r>
           </a:p>
           <a:p>
@@ -14702,7 +14702,7 @@
                 <a:latin typeface="Times New Roman"/>
                 <a:ea typeface="宋体"/>
               </a:rPr>
-              <a:t>（3）交换最优准则： </a:t>
+              <a:t>（3）交换最优准则：</a:t>
             </a:r>
             <a:r>
               <a:rPr sz="1250" b="0">
@@ -14712,7 +14712,7 @@
                 <a:latin typeface="Times New Roman"/>
                 <a:ea typeface="宋体"/>
               </a:rPr>
-              <a:t>任意两个消费者消费任意两种商品的边际替代率相等：MRS_{XY}^A = MRS_{XY}^B。</a:t>
+              <a:t>任意两个消费者消费任意两种商品的边际替代率相等：MRS_XY^A = MRS_XY^B。</a:t>
             </a:r>
           </a:p>
           <a:p>
@@ -14732,7 +14732,7 @@
                 <a:latin typeface="Times New Roman"/>
                 <a:ea typeface="宋体"/>
               </a:rPr>
-              <a:t>（4）生产与交换全面均衡： </a:t>
+              <a:t>（4）生产与交换全面均衡：</a:t>
             </a:r>
             <a:r>
               <a:rPr sz="1250" b="0">
@@ -14742,7 +14742,7 @@
                 <a:latin typeface="Times New Roman"/>
                 <a:ea typeface="宋体"/>
               </a:rPr>
-              <a:t>边际产品转换率等于边际替代率：MRT_{XY} = MRS_{XY}。</a:t>
+              <a:t>边际产品转换率等于边际替代率：MRT_XY = MRS_XY。</a:t>
             </a:r>
           </a:p>
         </p:txBody>
@@ -14842,7 +14842,7 @@
                 <a:latin typeface="Times New Roman"/>
                 <a:ea typeface="宋体"/>
               </a:rPr>
-              <a:t>  2. 市场失灵（Market Failure）的概念与政府功能定位</a:t>
+              <a:t>2. 市场失灵（Market Failure）的概念与政府功能定位</a:t>
             </a:r>
           </a:p>
         </p:txBody>
@@ -14885,7 +14885,7 @@
                 <a:latin typeface="Times New Roman"/>
                 <a:ea typeface="宋体"/>
               </a:rPr>
-              <a:t>（1）市场失灵定义： </a:t>
+              <a:t>（1）市场失灵定义：</a:t>
             </a:r>
             <a:r>
               <a:rPr sz="1250" b="0">
@@ -14915,7 +14915,7 @@
                 <a:latin typeface="Times New Roman"/>
                 <a:ea typeface="宋体"/>
               </a:rPr>
-              <a:t>（2）政府的经济角色定位： </a:t>
+              <a:t>（2）政府的经济角色定位：</a:t>
             </a:r>
             <a:r>
               <a:rPr sz="1250" b="0">
@@ -14982,7 +14982,7 @@
                 <a:latin typeface="Times New Roman"/>
                 <a:ea typeface="宋体"/>
               </a:rPr>
-              <a:t>  ★ 核心要点：帕累托最优为评价全社会经济效率提供了纯理论标杆，市场失灵为政府适度微观规制确立了法理边界。</a:t>
+              <a:t>★ 核心要点：帕累托最优为评价全社会经济效率提供了纯理论标杆，市场失灵为政府适度微观规制确立了法理边界。</a:t>
             </a:r>
           </a:p>
         </p:txBody>
@@ -15558,7 +15558,7 @@
                 <a:latin typeface="Times New Roman"/>
                 <a:ea typeface="宋体"/>
               </a:rPr>
-              <a:t>（1）机理： </a:t>
+              <a:t>（1）机理：</a:t>
             </a:r>
             <a:r>
               <a:rPr sz="1200" b="0">
@@ -15588,7 +15588,7 @@
                 <a:latin typeface="Times New Roman"/>
                 <a:ea typeface="宋体"/>
               </a:rPr>
-              <a:t>（2）后果： </a:t>
+              <a:t>（2）后果：</a:t>
             </a:r>
             <a:r>
               <a:rPr sz="1200" b="0">
@@ -15867,7 +15867,7 @@
                 <a:latin typeface="Times New Roman"/>
                 <a:ea typeface="宋体"/>
               </a:rPr>
-              <a:t>（1）机理： </a:t>
+              <a:t>（1）机理：</a:t>
             </a:r>
             <a:r>
               <a:rPr sz="1200" b="0">
@@ -15897,7 +15897,7 @@
                 <a:latin typeface="Times New Roman"/>
                 <a:ea typeface="宋体"/>
               </a:rPr>
-              <a:t>（2）后果： </a:t>
+              <a:t>（2）后果：</a:t>
             </a:r>
             <a:r>
               <a:rPr sz="1200" b="0">
@@ -16176,7 +16176,7 @@
                 <a:latin typeface="Times New Roman"/>
                 <a:ea typeface="宋体"/>
               </a:rPr>
-              <a:t>（1）机理： </a:t>
+              <a:t>（1）机理：</a:t>
             </a:r>
             <a:r>
               <a:rPr sz="1200" b="0">
@@ -16206,7 +16206,7 @@
                 <a:latin typeface="Times New Roman"/>
                 <a:ea typeface="宋体"/>
               </a:rPr>
-              <a:t>（2）后果： </a:t>
+              <a:t>（2）后果：</a:t>
             </a:r>
             <a:r>
               <a:rPr sz="1200" b="0">
@@ -16485,7 +16485,7 @@
                 <a:latin typeface="Times New Roman"/>
                 <a:ea typeface="宋体"/>
               </a:rPr>
-              <a:t>（1）机理： </a:t>
+              <a:t>（1）机理：</a:t>
             </a:r>
             <a:r>
               <a:rPr sz="1200" b="0">
@@ -16515,7 +16515,7 @@
                 <a:latin typeface="Times New Roman"/>
                 <a:ea typeface="宋体"/>
               </a:rPr>
-              <a:t>（2）后果： </a:t>
+              <a:t>（2）后果：</a:t>
             </a:r>
             <a:r>
               <a:rPr sz="1200" b="0">
@@ -16582,7 +16582,7 @@
                 <a:latin typeface="Times New Roman"/>
                 <a:ea typeface="宋体"/>
               </a:rPr>
-              <a:t>  ★ 重点启示：四大微观根源构成了现代福利经济学与政府公共管制政策的核心规制对象体系。</a:t>
+              <a:t>★ 重点启示：四大微观根源构成了现代福利经济学与政府公共管制政策的核心规制对象体系。</a:t>
             </a:r>
           </a:p>
         </p:txBody>
@@ -17296,7 +17296,7 @@
                 <a:latin typeface="Times New Roman"/>
                 <a:ea typeface="宋体"/>
               </a:rPr>
-              <a:t>  1. 反垄断法（Antitrust Law）四大核心执法工具</a:t>
+              <a:t>1. 反垄断法（Antitrust Law）四大核心执法工具</a:t>
             </a:r>
           </a:p>
         </p:txBody>
@@ -17339,7 +17339,7 @@
                 <a:latin typeface="Times New Roman"/>
                 <a:ea typeface="宋体"/>
               </a:rPr>
-              <a:t>（1）严厉禁止横向垄断协议与价格同盟： </a:t>
+              <a:t>（1）严厉禁止横向垄断协议与价格同盟：</a:t>
             </a:r>
             <a:r>
               <a:rPr sz="1250" b="0">
@@ -17369,7 +17369,7 @@
                 <a:latin typeface="Times New Roman"/>
                 <a:ea typeface="宋体"/>
               </a:rPr>
-              <a:t>（2）规制滥用市场支配地位（Abuse of Dominance）： </a:t>
+              <a:t>（2）规制滥用市场支配地位（Abuse of Dominance）：</a:t>
             </a:r>
             <a:r>
               <a:rPr sz="1250" b="0">
@@ -17399,7 +17399,7 @@
                 <a:latin typeface="Times New Roman"/>
                 <a:ea typeface="宋体"/>
               </a:rPr>
-              <a:t>（3）经营者集中反垄断审查（Merger Review）： </a:t>
+              <a:t>（3）经营者集中反垄断审查（Merger Review）：</a:t>
             </a:r>
             <a:r>
               <a:rPr sz="1250" b="0">
@@ -17429,7 +17429,7 @@
                 <a:latin typeface="Times New Roman"/>
                 <a:ea typeface="宋体"/>
               </a:rPr>
-              <a:t>（4）拆分垄断巨头： </a:t>
+              <a:t>（4）拆分垄断巨头：</a:t>
             </a:r>
             <a:r>
               <a:rPr sz="1250" b="0">
@@ -17539,7 +17539,7 @@
                 <a:latin typeface="Times New Roman"/>
                 <a:ea typeface="宋体"/>
               </a:rPr>
-              <a:t>  2. 案例10-1：合生元等乳粉企业价格垄断重磅处罚</a:t>
+              <a:t>2. 案例10-1：合生元等乳粉企业价格垄断重磅处罚</a:t>
             </a:r>
           </a:p>
         </p:txBody>
@@ -17582,7 +17582,7 @@
                 <a:latin typeface="Times New Roman"/>
                 <a:ea typeface="宋体"/>
               </a:rPr>
-              <a:t>（1）违法行为： </a:t>
+              <a:t>（1）违法行为：</a:t>
             </a:r>
             <a:r>
               <a:rPr sz="1250" b="0">
@@ -17612,7 +17612,7 @@
                 <a:latin typeface="Times New Roman"/>
                 <a:ea typeface="宋体"/>
               </a:rPr>
-              <a:t>（2）国家发改委反垄断处罚： </a:t>
+              <a:t>（2）国家发改委反垄断处罚：</a:t>
             </a:r>
             <a:r>
               <a:rPr sz="1250" b="0">
@@ -17679,7 +17679,7 @@
                 <a:latin typeface="Times New Roman"/>
                 <a:ea typeface="宋体"/>
               </a:rPr>
-              <a:t>  ★ 核心要点：反垄断执法是维护市场竞争活力、打破行政与行业垄断壁垒的经济宪法重器。</a:t>
+              <a:t>★ 核心要点：反垄断执法是维护市场竞争活力、打破行政与行业垄断壁垒的经济宪法重器。</a:t>
             </a:r>
           </a:p>
         </p:txBody>
@@ -18110,7 +18110,7 @@
                 <a:latin typeface="Times New Roman"/>
                 <a:ea typeface="宋体"/>
               </a:rPr>
-              <a:t>  自然垄断定价悖论与三大管制工具</a:t>
+              <a:t>自然垄断定价悖论与三大管制工具</a:t>
             </a:r>
           </a:p>
         </p:txBody>
@@ -18153,7 +18153,7 @@
                 <a:latin typeface="Times New Roman"/>
                 <a:ea typeface="宋体"/>
               </a:rPr>
-              <a:t>（1）自然垄断特征： </a:t>
+              <a:t>（1）自然垄断特征：</a:t>
             </a:r>
             <a:r>
               <a:rPr sz="1200" b="0">
@@ -18183,7 +18183,7 @@
                 <a:latin typeface="Times New Roman"/>
                 <a:ea typeface="宋体"/>
               </a:rPr>
-              <a:t>（2）边际成本定价悖论（P = MC）： </a:t>
+              <a:t>（2）边际成本定价悖论（P = MC）：</a:t>
             </a:r>
             <a:r>
               <a:rPr sz="1200" b="0">
@@ -18213,7 +18213,7 @@
                 <a:latin typeface="Times New Roman"/>
                 <a:ea typeface="宋体"/>
               </a:rPr>
-              <a:t>（3）平均成本定价法（P = AC，次优规制）： </a:t>
+              <a:t>（3）平均成本定价法（P = AC，次优规制）：</a:t>
             </a:r>
             <a:r>
               <a:rPr sz="1200" b="0">
@@ -18243,7 +18243,7 @@
                 <a:latin typeface="Times New Roman"/>
                 <a:ea typeface="宋体"/>
               </a:rPr>
-              <a:t>（4）价格上限规制（Price-Cap / RPI - X 模型）： </a:t>
+              <a:t>（4）价格上限规制（Price-Cap / RPI - X 模型）：</a:t>
             </a:r>
             <a:r>
               <a:rPr sz="1200" b="0">
@@ -18310,7 +18310,7 @@
                 <a:latin typeface="Times New Roman"/>
                 <a:ea typeface="宋体"/>
               </a:rPr>
-              <a:t>  ★ 理论精要：自然垄断管制必须在社会配置效率、企业财务生存可行性与长期降本激励三者之间寻求最佳平衡。</a:t>
+              <a:t>★ 理论精要：自然垄断管制必须在社会配置效率、企业财务生存可行性与长期降本激励三者之间寻求最佳平衡。</a:t>
             </a:r>
           </a:p>
         </p:txBody>
@@ -18717,7 +18717,7 @@
                 <a:latin typeface="Times New Roman"/>
                 <a:ea typeface="宋体"/>
               </a:rPr>
-              <a:t>  1. 投资回报率管制（Rate-of-Return Regulation）</a:t>
+              <a:t>1. 投资回报率管制（Rate-of-Return Regulation）</a:t>
             </a:r>
           </a:p>
         </p:txBody>
@@ -18760,7 +18760,7 @@
                 <a:latin typeface="Times New Roman"/>
                 <a:ea typeface="宋体"/>
               </a:rPr>
-              <a:t>（1）管制公式： </a:t>
+              <a:t>（1）管制公式：</a:t>
             </a:r>
             <a:r>
               <a:rPr sz="1250" b="0">
@@ -18770,7 +18770,7 @@
                 <a:latin typeface="Times New Roman"/>
                 <a:ea typeface="宋体"/>
               </a:rPr>
-              <a:t>总允许收入 TR = 经营成本 OE + 资本基数 (Rate Base) \times 法定公允回报率 s</a:t>
+              <a:t>总允许收入 TR = 经营成本 OE + 资本基数 (Rate Base) × 法定公允回报率 s</a:t>
             </a:r>
           </a:p>
           <a:p>
@@ -18790,7 +18790,7 @@
                 <a:latin typeface="Times New Roman"/>
                 <a:ea typeface="宋体"/>
               </a:rPr>
-              <a:t>（2）阿弗奇-约翰逊效应（A-J 效应）： </a:t>
+              <a:t>（2）阿弗奇-约翰逊效应（A-J 效应）：</a:t>
             </a:r>
             <a:r>
               <a:rPr sz="1250" b="0">
@@ -18820,7 +18820,7 @@
                 <a:latin typeface="Times New Roman"/>
                 <a:ea typeface="宋体"/>
               </a:rPr>
-              <a:t>（3）激励缺乏： </a:t>
+              <a:t>（3）激励缺乏：</a:t>
             </a:r>
             <a:r>
               <a:rPr sz="1250" b="0">
@@ -18930,7 +18930,7 @@
                 <a:latin typeface="Times New Roman"/>
                 <a:ea typeface="宋体"/>
               </a:rPr>
-              <a:t>  2. 价格上限激励性规制（RPI - X 模型）</a:t>
+              <a:t>2. 价格上限激励性规制（RPI - X 模型）</a:t>
             </a:r>
           </a:p>
         </p:txBody>
@@ -18973,7 +18973,7 @@
                 <a:latin typeface="Times New Roman"/>
                 <a:ea typeface="宋体"/>
               </a:rPr>
-              <a:t>（1）运作机制： </a:t>
+              <a:t>（1）运作机制：</a:t>
             </a:r>
             <a:r>
               <a:rPr sz="1250" b="0">
@@ -18983,7 +18983,7 @@
                 <a:latin typeface="Times New Roman"/>
                 <a:ea typeface="宋体"/>
               </a:rPr>
-              <a:t>政府提前锁定未来 3~5 年内的最高调价上限：\Delta P \le RPI - X。</a:t>
+              <a:t>政府提前锁定未来 3~5 年内的最高调价上限：Δ P ≤ RPI - X。</a:t>
             </a:r>
           </a:p>
           <a:p>
@@ -19003,7 +19003,7 @@
                 <a:latin typeface="Times New Roman"/>
                 <a:ea typeface="宋体"/>
               </a:rPr>
-              <a:t>（2）自主降本留存机制： </a:t>
+              <a:t>（2）自主降本留存机制：</a:t>
             </a:r>
             <a:r>
               <a:rPr sz="1250" b="0">
@@ -19033,7 +19033,7 @@
                 <a:latin typeface="Times New Roman"/>
                 <a:ea typeface="宋体"/>
               </a:rPr>
-              <a:t>（3）国际主流趋势： </a:t>
+              <a:t>（3）国际主流趋势：</a:t>
             </a:r>
             <a:r>
               <a:rPr sz="1250" b="0">
@@ -19100,7 +19100,7 @@
                 <a:latin typeface="Times New Roman"/>
                 <a:ea typeface="宋体"/>
               </a:rPr>
-              <a:t>  ★ 核心要点：从成本加成型 ROR 转向激励型 RPI-X，代表了现代公用事业规制理论的重大飞跃。</a:t>
+              <a:t>★ 核心要点：从成本加成型 ROR 转向激励型 RPI-X，代表了现代公用事业规制理论的重大飞跃。</a:t>
             </a:r>
           </a:p>
         </p:txBody>
